--- a/textbook/ppt/chapter08_ppt.pptx
+++ b/textbook/ppt/chapter08_ppt.pptx
@@ -7,6 +7,12 @@
   <p:sldIdLst>
     <p:sldId id="256" r:id="rId7"/>
     <p:sldId id="257" r:id="rId8"/>
+    <p:sldId id="258" r:id="rId9"/>
+    <p:sldId id="259" r:id="rId10"/>
+    <p:sldId id="260" r:id="rId11"/>
+    <p:sldId id="261" r:id="rId12"/>
+    <p:sldId id="262" r:id="rId13"/>
+    <p:sldId id="263" r:id="rId14"/>
   </p:sldIdLst>
   <p:sldSz cx="12188952" cy="6858000" type="screen4x3"/>
   <p:notesSz cx="6858000" cy="9144000"/>
@@ -3229,6 +3235,632 @@
             <a:r>
               <a:rPr sz="1800"/>
               <a:t>• STL容器的基本概念与应用</a:t>
+            </a:r>
+          </a:p>
+        </p:txBody>
+      </p:sp>
+    </p:spTree>
+  </p:cSld>
+  <p:clrMapOvr>
+    <a:masterClrMapping/>
+  </p:clrMapOvr>
+</p:sld>
+</file>
+
+<file path=ppt/slides/slide3.xml><?xml version="1.0" encoding="utf-8"?>
+<p:sld xmlns:a="http://schemas.openxmlformats.org/drawingml/2006/main" xmlns:p="http://schemas.openxmlformats.org/presentationml/2006/main" xmlns:r="http://schemas.openxmlformats.org/officeDocument/2006/relationships">
+  <p:cSld>
+    <p:spTree>
+      <p:nvGrpSpPr>
+        <p:cNvPr id="1" name=""/>
+        <p:cNvGrpSpPr/>
+        <p:nvPr/>
+      </p:nvGrpSpPr>
+      <p:grpSpPr/>
+      <p:sp>
+        <p:nvSpPr>
+          <p:cNvPr id="2" name="TextBox 1"/>
+          <p:cNvSpPr txBox="1"/>
+          <p:nvPr/>
+        </p:nvSpPr>
+        <p:spPr>
+          <a:xfrm>
+            <a:off x="914400" y="457200"/>
+            <a:ext cx="10058400" cy="914400"/>
+          </a:xfrm>
+          <a:prstGeom prst="rect">
+            <a:avLst/>
+          </a:prstGeom>
+          <a:noFill/>
+        </p:spPr>
+        <p:txBody>
+          <a:bodyPr wrap="none">
+            <a:spAutoFit/>
+          </a:bodyPr>
+          <a:lstStyle/>
+          <a:p>
+            <a:r>
+              <a:rPr sz="2800" b="1">
+                <a:solidFill>
+                  <a:srgbClr val="8B0000"/>
+                </a:solidFill>
+              </a:rPr>
+              <a:t>本章概览</a:t>
+            </a:r>
+          </a:p>
+        </p:txBody>
+      </p:sp>
+      <p:sp>
+        <p:nvSpPr>
+          <p:cNvPr id="3" name="TextBox 2"/>
+          <p:cNvSpPr txBox="1"/>
+          <p:nvPr/>
+        </p:nvSpPr>
+        <p:spPr>
+          <a:xfrm>
+            <a:off x="914400" y="1371600"/>
+            <a:ext cx="10058400" cy="5029200"/>
+          </a:xfrm>
+          <a:prstGeom prst="rect">
+            <a:avLst/>
+          </a:prstGeom>
+          <a:noFill/>
+        </p:spPr>
+        <p:txBody>
+          <a:bodyPr wrap="none">
+            <a:spAutoFit/>
+          </a:bodyPr>
+          <a:lstStyle/>
+          <a:p/>
+          <a:p>
+            <a:r>
+              <a:rPr sz="1600">
+                <a:solidFill>
+                  <a:srgbClr val="000000"/>
+                </a:solidFill>
+              </a:rPr>
+              <a:t>栈 Stack：后进先出(LIFO)</a:t>
+            </a:r>
+          </a:p>
+          <a:p>
+            <a:r>
+              <a:rPr sz="1600">
+                <a:solidFill>
+                  <a:srgbClr val="000000"/>
+                </a:solidFill>
+              </a:rPr>
+              <a:t>队列 Queue：先进先出(FIFO)</a:t>
+            </a:r>
+          </a:p>
+          <a:p>
+            <a:r>
+              <a:rPr sz="1600">
+                <a:solidFill>
+                  <a:srgbClr val="000000"/>
+                </a:solidFill>
+              </a:rPr>
+              <a:t>链表：动态增删，不能随机访问</a:t>
+            </a:r>
+          </a:p>
+          <a:p>
+            <a:r>
+              <a:rPr sz="1600">
+                <a:solidFill>
+                  <a:srgbClr val="000000"/>
+                </a:solidFill>
+              </a:rPr>
+              <a:t>STL容器：vector, stack, queue</a:t>
+            </a:r>
+          </a:p>
+        </p:txBody>
+      </p:sp>
+    </p:spTree>
+  </p:cSld>
+  <p:clrMapOvr>
+    <a:masterClrMapping/>
+  </p:clrMapOvr>
+</p:sld>
+</file>
+
+<file path=ppt/slides/slide4.xml><?xml version="1.0" encoding="utf-8"?>
+<p:sld xmlns:a="http://schemas.openxmlformats.org/drawingml/2006/main" xmlns:p="http://schemas.openxmlformats.org/presentationml/2006/main" xmlns:r="http://schemas.openxmlformats.org/officeDocument/2006/relationships">
+  <p:cSld>
+    <p:spTree>
+      <p:nvGrpSpPr>
+        <p:cNvPr id="1" name=""/>
+        <p:cNvGrpSpPr/>
+        <p:nvPr/>
+      </p:nvGrpSpPr>
+      <p:grpSpPr/>
+      <p:sp>
+        <p:nvSpPr>
+          <p:cNvPr id="2" name="TextBox 1"/>
+          <p:cNvSpPr txBox="1"/>
+          <p:nvPr/>
+        </p:nvSpPr>
+        <p:spPr>
+          <a:xfrm>
+            <a:off x="914400" y="457200"/>
+            <a:ext cx="10058400" cy="914400"/>
+          </a:xfrm>
+          <a:prstGeom prst="rect">
+            <a:avLst/>
+          </a:prstGeom>
+          <a:noFill/>
+        </p:spPr>
+        <p:txBody>
+          <a:bodyPr wrap="none">
+            <a:spAutoFit/>
+          </a:bodyPr>
+          <a:lstStyle/>
+          <a:p>
+            <a:r>
+              <a:rPr sz="2800" b="1">
+                <a:solidFill>
+                  <a:srgbClr val="8B0000"/>
+                </a:solidFill>
+              </a:rPr>
+              <a:t>C++ 代码示例</a:t>
+            </a:r>
+          </a:p>
+        </p:txBody>
+      </p:sp>
+      <p:sp>
+        <p:nvSpPr>
+          <p:cNvPr id="3" name="TextBox 2"/>
+          <p:cNvSpPr txBox="1"/>
+          <p:nvPr/>
+        </p:nvSpPr>
+        <p:spPr>
+          <a:xfrm>
+            <a:off x="914400" y="1371600"/>
+            <a:ext cx="10058400" cy="5029200"/>
+          </a:xfrm>
+          <a:prstGeom prst="rect">
+            <a:avLst/>
+          </a:prstGeom>
+          <a:noFill/>
+        </p:spPr>
+        <p:txBody>
+          <a:bodyPr wrap="none">
+            <a:spAutoFit/>
+          </a:bodyPr>
+          <a:lstStyle/>
+          <a:p/>
+          <a:p>
+            <a:r>
+              <a:rPr sz="1400">
+                <a:solidFill>
+                  <a:srgbClr val="000000"/>
+                </a:solidFill>
+              </a:rPr>
+              <a:t>stack&lt;int&gt; stk;
+stk.push(1);
+int top = stk.top();
+stk.pop();</a:t>
+            </a:r>
+          </a:p>
+        </p:txBody>
+      </p:sp>
+    </p:spTree>
+  </p:cSld>
+  <p:clrMapOvr>
+    <a:masterClrMapping/>
+  </p:clrMapOvr>
+</p:sld>
+</file>
+
+<file path=ppt/slides/slide5.xml><?xml version="1.0" encoding="utf-8"?>
+<p:sld xmlns:a="http://schemas.openxmlformats.org/drawingml/2006/main" xmlns:p="http://schemas.openxmlformats.org/presentationml/2006/main" xmlns:r="http://schemas.openxmlformats.org/officeDocument/2006/relationships">
+  <p:cSld>
+    <p:spTree>
+      <p:nvGrpSpPr>
+        <p:cNvPr id="1" name=""/>
+        <p:cNvGrpSpPr/>
+        <p:nvPr/>
+      </p:nvGrpSpPr>
+      <p:grpSpPr/>
+      <p:sp>
+        <p:nvSpPr>
+          <p:cNvPr id="2" name="TextBox 1"/>
+          <p:cNvSpPr txBox="1"/>
+          <p:nvPr/>
+        </p:nvSpPr>
+        <p:spPr>
+          <a:xfrm>
+            <a:off x="914400" y="457200"/>
+            <a:ext cx="10058400" cy="914400"/>
+          </a:xfrm>
+          <a:prstGeom prst="rect">
+            <a:avLst/>
+          </a:prstGeom>
+          <a:noFill/>
+        </p:spPr>
+        <p:txBody>
+          <a:bodyPr wrap="none">
+            <a:spAutoFit/>
+          </a:bodyPr>
+          <a:lstStyle/>
+          <a:p>
+            <a:r>
+              <a:rPr sz="2800" b="1">
+                <a:solidFill>
+                  <a:srgbClr val="8B0000"/>
+                </a:solidFill>
+              </a:rPr>
+              <a:t>Python 代码示例</a:t>
+            </a:r>
+          </a:p>
+        </p:txBody>
+      </p:sp>
+      <p:sp>
+        <p:nvSpPr>
+          <p:cNvPr id="3" name="TextBox 2"/>
+          <p:cNvSpPr txBox="1"/>
+          <p:nvPr/>
+        </p:nvSpPr>
+        <p:spPr>
+          <a:xfrm>
+            <a:off x="914400" y="1371600"/>
+            <a:ext cx="10058400" cy="5029200"/>
+          </a:xfrm>
+          <a:prstGeom prst="rect">
+            <a:avLst/>
+          </a:prstGeom>
+          <a:noFill/>
+        </p:spPr>
+        <p:txBody>
+          <a:bodyPr wrap="none">
+            <a:spAutoFit/>
+          </a:bodyPr>
+          <a:lstStyle/>
+          <a:p/>
+          <a:p>
+            <a:r>
+              <a:rPr sz="1400">
+                <a:solidFill>
+                  <a:srgbClr val="000000"/>
+                </a:solidFill>
+              </a:rPr>
+              <a:t>stk = []
+stk.append(1)
+top = stk[-1]
+stk.pop()</a:t>
+            </a:r>
+          </a:p>
+        </p:txBody>
+      </p:sp>
+    </p:spTree>
+  </p:cSld>
+  <p:clrMapOvr>
+    <a:masterClrMapping/>
+  </p:clrMapOvr>
+</p:sld>
+</file>
+
+<file path=ppt/slides/slide6.xml><?xml version="1.0" encoding="utf-8"?>
+<p:sld xmlns:a="http://schemas.openxmlformats.org/drawingml/2006/main" xmlns:p="http://schemas.openxmlformats.org/presentationml/2006/main" xmlns:r="http://schemas.openxmlformats.org/officeDocument/2006/relationships">
+  <p:cSld>
+    <p:spTree>
+      <p:nvGrpSpPr>
+        <p:cNvPr id="1" name=""/>
+        <p:cNvGrpSpPr/>
+        <p:nvPr/>
+      </p:nvGrpSpPr>
+      <p:grpSpPr/>
+      <p:sp>
+        <p:nvSpPr>
+          <p:cNvPr id="2" name="TextBox 1"/>
+          <p:cNvSpPr txBox="1"/>
+          <p:nvPr/>
+        </p:nvSpPr>
+        <p:spPr>
+          <a:xfrm>
+            <a:off x="914400" y="457200"/>
+            <a:ext cx="10058400" cy="914400"/>
+          </a:xfrm>
+          <a:prstGeom prst="rect">
+            <a:avLst/>
+          </a:prstGeom>
+          <a:noFill/>
+        </p:spPr>
+        <p:txBody>
+          <a:bodyPr wrap="none">
+            <a:spAutoFit/>
+          </a:bodyPr>
+          <a:lstStyle/>
+          <a:p>
+            <a:r>
+              <a:rPr sz="2800" b="1">
+                <a:solidFill>
+                  <a:srgbClr val="8B0000"/>
+                </a:solidFill>
+              </a:rPr>
+              <a:t>常见错误</a:t>
+            </a:r>
+          </a:p>
+        </p:txBody>
+      </p:sp>
+      <p:sp>
+        <p:nvSpPr>
+          <p:cNvPr id="3" name="TextBox 2"/>
+          <p:cNvSpPr txBox="1"/>
+          <p:nvPr/>
+        </p:nvSpPr>
+        <p:spPr>
+          <a:xfrm>
+            <a:off x="914400" y="1371600"/>
+            <a:ext cx="10058400" cy="5029200"/>
+          </a:xfrm>
+          <a:prstGeom prst="rect">
+            <a:avLst/>
+          </a:prstGeom>
+          <a:noFill/>
+        </p:spPr>
+        <p:txBody>
+          <a:bodyPr wrap="none">
+            <a:spAutoFit/>
+          </a:bodyPr>
+          <a:lstStyle/>
+          <a:p/>
+          <a:p>
+            <a:r>
+              <a:rPr sz="1600">
+                <a:solidFill>
+                  <a:srgbClr val="000000"/>
+                </a:solidFill>
+              </a:rPr>
+              <a:t>栈空时pop/peek会出错</a:t>
+            </a:r>
+          </a:p>
+          <a:p>
+            <a:r>
+              <a:rPr sz="1600">
+                <a:solidFill>
+                  <a:srgbClr val="000000"/>
+                </a:solidFill>
+              </a:rPr>
+              <a:t>队列空时front会出错</a:t>
+            </a:r>
+          </a:p>
+          <a:p>
+            <a:r>
+              <a:rPr sz="1600">
+                <a:solidFill>
+                  <a:srgbClr val="000000"/>
+                </a:solidFill>
+              </a:rPr>
+              <a:t>链表操作顺序很重要</a:t>
+            </a:r>
+          </a:p>
+          <a:p>
+            <a:r>
+              <a:rPr sz="1600">
+                <a:solidFill>
+                  <a:srgbClr val="000000"/>
+                </a:solidFill>
+              </a:rPr>
+              <a:t>STL容器的size()是O(1)</a:t>
+            </a:r>
+          </a:p>
+        </p:txBody>
+      </p:sp>
+    </p:spTree>
+  </p:cSld>
+  <p:clrMapOvr>
+    <a:masterClrMapping/>
+  </p:clrMapOvr>
+</p:sld>
+</file>
+
+<file path=ppt/slides/slide7.xml><?xml version="1.0" encoding="utf-8"?>
+<p:sld xmlns:a="http://schemas.openxmlformats.org/drawingml/2006/main" xmlns:p="http://schemas.openxmlformats.org/presentationml/2006/main" xmlns:r="http://schemas.openxmlformats.org/officeDocument/2006/relationships">
+  <p:cSld>
+    <p:spTree>
+      <p:nvGrpSpPr>
+        <p:cNvPr id="1" name=""/>
+        <p:cNvGrpSpPr/>
+        <p:nvPr/>
+      </p:nvGrpSpPr>
+      <p:grpSpPr/>
+      <p:sp>
+        <p:nvSpPr>
+          <p:cNvPr id="2" name="TextBox 1"/>
+          <p:cNvSpPr txBox="1"/>
+          <p:nvPr/>
+        </p:nvSpPr>
+        <p:spPr>
+          <a:xfrm>
+            <a:off x="914400" y="457200"/>
+            <a:ext cx="10058400" cy="914400"/>
+          </a:xfrm>
+          <a:prstGeom prst="rect">
+            <a:avLst/>
+          </a:prstGeom>
+          <a:noFill/>
+        </p:spPr>
+        <p:txBody>
+          <a:bodyPr wrap="none">
+            <a:spAutoFit/>
+          </a:bodyPr>
+          <a:lstStyle/>
+          <a:p>
+            <a:r>
+              <a:rPr sz="2800" b="1">
+                <a:solidFill>
+                  <a:srgbClr val="8B0000"/>
+                </a:solidFill>
+              </a:rPr>
+              <a:t>练习题目</a:t>
+            </a:r>
+          </a:p>
+        </p:txBody>
+      </p:sp>
+      <p:sp>
+        <p:nvSpPr>
+          <p:cNvPr id="3" name="TextBox 2"/>
+          <p:cNvSpPr txBox="1"/>
+          <p:nvPr/>
+        </p:nvSpPr>
+        <p:spPr>
+          <a:xfrm>
+            <a:off x="914400" y="1371600"/>
+            <a:ext cx="10058400" cy="5029200"/>
+          </a:xfrm>
+          <a:prstGeom prst="rect">
+            <a:avLst/>
+          </a:prstGeom>
+          <a:noFill/>
+        </p:spPr>
+        <p:txBody>
+          <a:bodyPr wrap="none">
+            <a:spAutoFit/>
+          </a:bodyPr>
+          <a:lstStyle/>
+          <a:p/>
+          <a:p>
+            <a:r>
+              <a:rPr sz="1600">
+                <a:solidFill>
+                  <a:srgbClr val="000000"/>
+                </a:solidFill>
+              </a:rPr>
+              <a:t>JD099 双栈为队</a:t>
+            </a:r>
+          </a:p>
+          <a:p>
+            <a:r>
+              <a:rPr sz="1600">
+                <a:solidFill>
+                  <a:srgbClr val="000000"/>
+                </a:solidFill>
+              </a:rPr>
+              <a:t>JD100 铁链翻转</a:t>
+            </a:r>
+          </a:p>
+          <a:p>
+            <a:r>
+              <a:rPr sz="1600">
+                <a:solidFill>
+                  <a:srgbClr val="000000"/>
+                </a:solidFill>
+              </a:rPr>
+              <a:t>JD101 双链归并</a:t>
+            </a:r>
+          </a:p>
+        </p:txBody>
+      </p:sp>
+    </p:spTree>
+  </p:cSld>
+  <p:clrMapOvr>
+    <a:masterClrMapping/>
+  </p:clrMapOvr>
+</p:sld>
+</file>
+
+<file path=ppt/slides/slide8.xml><?xml version="1.0" encoding="utf-8"?>
+<p:sld xmlns:a="http://schemas.openxmlformats.org/drawingml/2006/main" xmlns:p="http://schemas.openxmlformats.org/presentationml/2006/main" xmlns:r="http://schemas.openxmlformats.org/officeDocument/2006/relationships">
+  <p:cSld>
+    <p:spTree>
+      <p:nvGrpSpPr>
+        <p:cNvPr id="1" name=""/>
+        <p:cNvGrpSpPr/>
+        <p:nvPr/>
+      </p:nvGrpSpPr>
+      <p:grpSpPr/>
+      <p:sp>
+        <p:nvSpPr>
+          <p:cNvPr id="2" name="TextBox 1"/>
+          <p:cNvSpPr txBox="1"/>
+          <p:nvPr/>
+        </p:nvSpPr>
+        <p:spPr>
+          <a:xfrm>
+            <a:off x="914400" y="457200"/>
+            <a:ext cx="10058400" cy="914400"/>
+          </a:xfrm>
+          <a:prstGeom prst="rect">
+            <a:avLst/>
+          </a:prstGeom>
+          <a:noFill/>
+        </p:spPr>
+        <p:txBody>
+          <a:bodyPr wrap="none">
+            <a:spAutoFit/>
+          </a:bodyPr>
+          <a:lstStyle/>
+          <a:p>
+            <a:r>
+              <a:rPr sz="2800" b="1">
+                <a:solidFill>
+                  <a:srgbClr val="8B0000"/>
+                </a:solidFill>
+              </a:rPr>
+              <a:t>本章小结</a:t>
+            </a:r>
+          </a:p>
+        </p:txBody>
+      </p:sp>
+      <p:sp>
+        <p:nvSpPr>
+          <p:cNvPr id="3" name="TextBox 2"/>
+          <p:cNvSpPr txBox="1"/>
+          <p:nvPr/>
+        </p:nvSpPr>
+        <p:spPr>
+          <a:xfrm>
+            <a:off x="914400" y="1371600"/>
+            <a:ext cx="10058400" cy="5029200"/>
+          </a:xfrm>
+          <a:prstGeom prst="rect">
+            <a:avLst/>
+          </a:prstGeom>
+          <a:noFill/>
+        </p:spPr>
+        <p:txBody>
+          <a:bodyPr wrap="none">
+            <a:spAutoFit/>
+          </a:bodyPr>
+          <a:lstStyle/>
+          <a:p/>
+          <a:p>
+            <a:r>
+              <a:rPr sz="1600">
+                <a:solidFill>
+                  <a:srgbClr val="000000"/>
+                </a:solidFill>
+              </a:rPr>
+              <a:t>掌握核心概念</a:t>
+            </a:r>
+          </a:p>
+          <a:p>
+            <a:r>
+              <a:rPr sz="1600">
+                <a:solidFill>
+                  <a:srgbClr val="000000"/>
+                </a:solidFill>
+              </a:rPr>
+              <a:t>多做练习</a:t>
+            </a:r>
+          </a:p>
+          <a:p>
+            <a:r>
+              <a:rPr sz="1600">
+                <a:solidFill>
+                  <a:srgbClr val="000000"/>
+                </a:solidFill>
+              </a:rPr>
+              <a:t>注意边界条件</a:t>
+            </a:r>
+          </a:p>
+          <a:p>
+            <a:r>
+              <a:rPr sz="1600">
+                <a:solidFill>
+                  <a:srgbClr val="000000"/>
+                </a:solidFill>
+              </a:rPr>
+              <a:t>理解算法思想而非死记代码</a:t>
             </a:r>
           </a:p>
         </p:txBody>

--- a/textbook/ppt/chapter08_ppt.pptx
+++ b/textbook/ppt/chapter08_ppt.pptx
@@ -12,7 +12,6 @@
     <p:sldId id="260" r:id="rId11"/>
     <p:sldId id="261" r:id="rId12"/>
     <p:sldId id="262" r:id="rId13"/>
-    <p:sldId id="263" r:id="rId14"/>
   </p:sldIdLst>
   <p:sldSz cx="12188952" cy="6858000" type="screen4x3"/>
   <p:notesSz cx="6858000" cy="9144000"/>
@@ -3124,18 +3123,7 @@
                   <a:srgbClr val="8B0000"/>
                 </a:solidFill>
               </a:rPr>
-              <a:t>第8章 百器图谱</a:t>
-            </a:r>
-          </a:p>
-          <a:p>
-            <a:pPr algn="ctr"/>
-            <a:r>
-              <a:rPr sz="2400">
-                <a:solidFill>
-                  <a:srgbClr val="6B5D4D"/>
-                </a:solidFill>
-              </a:rPr>
-              <a:t>容器与内置算法</a:t>
+              <a:t>第8章</a:t>
             </a:r>
           </a:p>
         </p:txBody>
@@ -3166,8 +3154,8 @@
         </p:nvSpPr>
         <p:spPr>
           <a:xfrm>
-            <a:off x="914400" y="457200"/>
-            <a:ext cx="10058400" cy="914400"/>
+            <a:off x="457200" y="274320"/>
+            <a:ext cx="10972800" cy="731520"/>
           </a:xfrm>
           <a:prstGeom prst="rect">
             <a:avLst/>
@@ -3181,7 +3169,7 @@
           <a:lstStyle/>
           <a:p>
             <a:r>
-              <a:rPr sz="2800" b="1">
+              <a:rPr sz="2400" b="1">
                 <a:solidFill>
                   <a:srgbClr val="8B0000"/>
                 </a:solidFill>
@@ -3199,8 +3187,8 @@
         </p:nvSpPr>
         <p:spPr>
           <a:xfrm>
-            <a:off x="914400" y="1371600"/>
-            <a:ext cx="10058400" cy="4572000"/>
+            <a:off x="457200" y="1097280"/>
+            <a:ext cx="10972800" cy="5029200"/>
           </a:xfrm>
           <a:prstGeom prst="rect">
             <a:avLst/>
@@ -3215,26 +3203,42 @@
           <a:p/>
           <a:p>
             <a:r>
-              <a:rPr sz="1800"/>
-              <a:t>• 栈 Stack的基本概念与应用</a:t>
-            </a:r>
-          </a:p>
-          <a:p>
-            <a:r>
-              <a:rPr sz="1800"/>
-              <a:t>• 队列 Queue的基本概念与应用</a:t>
-            </a:r>
-          </a:p>
-          <a:p>
-            <a:r>
-              <a:rPr sz="1800"/>
-              <a:t>• 链表基础的基本概念与应用</a:t>
-            </a:r>
-          </a:p>
-          <a:p>
-            <a:r>
-              <a:rPr sz="1800"/>
-              <a:t>• STL容器的基本概念与应用</a:t>
+              <a:rPr sz="1400">
+                <a:solidFill>
+                  <a:srgbClr val="000000"/>
+                </a:solidFill>
+              </a:rPr>
+              <a:t>栈 Stack：后进先出(LIFO) - 像叠盘子</a:t>
+            </a:r>
+          </a:p>
+          <a:p>
+            <a:r>
+              <a:rPr sz="1400">
+                <a:solidFill>
+                  <a:srgbClr val="000000"/>
+                </a:solidFill>
+              </a:rPr>
+              <a:t>队列 Queue：先进先出(FIFO) - 像排队</a:t>
+            </a:r>
+          </a:p>
+          <a:p>
+            <a:r>
+              <a:rPr sz="1400">
+                <a:solidFill>
+                  <a:srgbClr val="000000"/>
+                </a:solidFill>
+              </a:rPr>
+              <a:t>链表：动态增删 O(1)，不能随机访问</a:t>
+            </a:r>
+          </a:p>
+          <a:p>
+            <a:r>
+              <a:rPr sz="1400">
+                <a:solidFill>
+                  <a:srgbClr val="000000"/>
+                </a:solidFill>
+              </a:rPr>
+              <a:t>STL容器：vector(动态数组), stack, queue</a:t>
             </a:r>
           </a:p>
         </p:txBody>
@@ -3265,8 +3269,8 @@
         </p:nvSpPr>
         <p:spPr>
           <a:xfrm>
-            <a:off x="914400" y="457200"/>
-            <a:ext cx="10058400" cy="914400"/>
+            <a:off x="457200" y="274320"/>
+            <a:ext cx="10972800" cy="731520"/>
           </a:xfrm>
           <a:prstGeom prst="rect">
             <a:avLst/>
@@ -3280,12 +3284,12 @@
           <a:lstStyle/>
           <a:p>
             <a:r>
-              <a:rPr sz="2800" b="1">
+              <a:rPr sz="2400" b="1">
                 <a:solidFill>
                   <a:srgbClr val="8B0000"/>
                 </a:solidFill>
               </a:rPr>
-              <a:t>本章概览</a:t>
+              <a:t>C++ 代码示例</a:t>
             </a:r>
           </a:p>
         </p:txBody>
@@ -3298,8 +3302,8 @@
         </p:nvSpPr>
         <p:spPr>
           <a:xfrm>
-            <a:off x="914400" y="1371600"/>
-            <a:ext cx="10058400" cy="5029200"/>
+            <a:off x="457200" y="1097280"/>
+            <a:ext cx="10972800" cy="5029200"/>
           </a:xfrm>
           <a:prstGeom prst="rect">
             <a:avLst/>
@@ -3314,42 +3318,17 @@
           <a:p/>
           <a:p>
             <a:r>
-              <a:rPr sz="1600">
+              <a:rPr sz="1200">
                 <a:solidFill>
                   <a:srgbClr val="000000"/>
                 </a:solidFill>
               </a:rPr>
-              <a:t>栈 Stack：后进先出(LIFO)</a:t>
-            </a:r>
-          </a:p>
-          <a:p>
-            <a:r>
-              <a:rPr sz="1600">
-                <a:solidFill>
-                  <a:srgbClr val="000000"/>
-                </a:solidFill>
-              </a:rPr>
-              <a:t>队列 Queue：先进先出(FIFO)</a:t>
-            </a:r>
-          </a:p>
-          <a:p>
-            <a:r>
-              <a:rPr sz="1600">
-                <a:solidFill>
-                  <a:srgbClr val="000000"/>
-                </a:solidFill>
-              </a:rPr>
-              <a:t>链表：动态增删，不能随机访问</a:t>
-            </a:r>
-          </a:p>
-          <a:p>
-            <a:r>
-              <a:rPr sz="1600">
-                <a:solidFill>
-                  <a:srgbClr val="000000"/>
-                </a:solidFill>
-              </a:rPr>
-              <a:t>STL容器：vector, stack, queue</a:t>
+              <a:t>stack&lt;int&gt; stk;
+stk.push(1);
+stk.push(2);
+cout &lt;&lt; stk.top() &lt;&lt; endl; // 2
+stk.pop();
+cout &lt;&lt; stk.top() &lt;&lt; endl; // 1</a:t>
             </a:r>
           </a:p>
         </p:txBody>
@@ -3380,8 +3359,8 @@
         </p:nvSpPr>
         <p:spPr>
           <a:xfrm>
-            <a:off x="914400" y="457200"/>
-            <a:ext cx="10058400" cy="914400"/>
+            <a:off x="457200" y="274320"/>
+            <a:ext cx="10972800" cy="731520"/>
           </a:xfrm>
           <a:prstGeom prst="rect">
             <a:avLst/>
@@ -3395,12 +3374,12 @@
           <a:lstStyle/>
           <a:p>
             <a:r>
-              <a:rPr sz="2800" b="1">
+              <a:rPr sz="2400" b="1">
                 <a:solidFill>
                   <a:srgbClr val="8B0000"/>
                 </a:solidFill>
               </a:rPr>
-              <a:t>C++ 代码示例</a:t>
+              <a:t>Python 代码示例</a:t>
             </a:r>
           </a:p>
         </p:txBody>
@@ -3413,8 +3392,8 @@
         </p:nvSpPr>
         <p:spPr>
           <a:xfrm>
-            <a:off x="914400" y="1371600"/>
-            <a:ext cx="10058400" cy="5029200"/>
+            <a:off x="457200" y="1097280"/>
+            <a:ext cx="10972800" cy="5029200"/>
           </a:xfrm>
           <a:prstGeom prst="rect">
             <a:avLst/>
@@ -3429,15 +3408,17 @@
           <a:p/>
           <a:p>
             <a:r>
-              <a:rPr sz="1400">
+              <a:rPr sz="1200">
                 <a:solidFill>
                   <a:srgbClr val="000000"/>
                 </a:solidFill>
               </a:rPr>
-              <a:t>stack&lt;int&gt; stk;
-stk.push(1);
-int top = stk.top();
-stk.pop();</a:t>
+              <a:t>stk = []
+stk.append(1)
+stk.append(2)
+print(stk[-1])  # 2
+stk.pop()
+print(stk[-1])  # 1</a:t>
             </a:r>
           </a:p>
         </p:txBody>
@@ -3468,8 +3449,8 @@
         </p:nvSpPr>
         <p:spPr>
           <a:xfrm>
-            <a:off x="914400" y="457200"/>
-            <a:ext cx="10058400" cy="914400"/>
+            <a:off x="457200" y="274320"/>
+            <a:ext cx="10972800" cy="731520"/>
           </a:xfrm>
           <a:prstGeom prst="rect">
             <a:avLst/>
@@ -3483,12 +3464,12 @@
           <a:lstStyle/>
           <a:p>
             <a:r>
-              <a:rPr sz="2800" b="1">
+              <a:rPr sz="2400" b="1">
                 <a:solidFill>
                   <a:srgbClr val="8B0000"/>
                 </a:solidFill>
               </a:rPr>
-              <a:t>Python 代码示例</a:t>
+              <a:t>常见错误</a:t>
             </a:r>
           </a:p>
         </p:txBody>
@@ -3501,8 +3482,8 @@
         </p:nvSpPr>
         <p:spPr>
           <a:xfrm>
-            <a:off x="914400" y="1371600"/>
-            <a:ext cx="10058400" cy="5029200"/>
+            <a:off x="457200" y="1097280"/>
+            <a:ext cx="10972800" cy="5029200"/>
           </a:xfrm>
           <a:prstGeom prst="rect">
             <a:avLst/>
@@ -3522,10 +3503,37 @@
                   <a:srgbClr val="000000"/>
                 </a:solidFill>
               </a:rPr>
-              <a:t>stk = []
-stk.append(1)
-top = stk[-1]
-stk.pop()</a:t>
+              <a:t>栈空时 pop/top 会出错</a:t>
+            </a:r>
+          </a:p>
+          <a:p>
+            <a:r>
+              <a:rPr sz="1400">
+                <a:solidFill>
+                  <a:srgbClr val="000000"/>
+                </a:solidFill>
+              </a:rPr>
+              <a:t>队列空时 front 会出错</a:t>
+            </a:r>
+          </a:p>
+          <a:p>
+            <a:r>
+              <a:rPr sz="1400">
+                <a:solidFill>
+                  <a:srgbClr val="000000"/>
+                </a:solidFill>
+              </a:rPr>
+              <a:t>链表操作顺序很重要：先改指针再删节点</a:t>
+            </a:r>
+          </a:p>
+          <a:p>
+            <a:r>
+              <a:rPr sz="1400">
+                <a:solidFill>
+                  <a:srgbClr val="000000"/>
+                </a:solidFill>
+              </a:rPr>
+              <a:t>STL容器的 size() 是 O(1)</a:t>
             </a:r>
           </a:p>
         </p:txBody>
@@ -3556,8 +3564,8 @@
         </p:nvSpPr>
         <p:spPr>
           <a:xfrm>
-            <a:off x="914400" y="457200"/>
-            <a:ext cx="10058400" cy="914400"/>
+            <a:off x="457200" y="274320"/>
+            <a:ext cx="10972800" cy="731520"/>
           </a:xfrm>
           <a:prstGeom prst="rect">
             <a:avLst/>
@@ -3571,12 +3579,12 @@
           <a:lstStyle/>
           <a:p>
             <a:r>
-              <a:rPr sz="2800" b="1">
+              <a:rPr sz="2400" b="1">
                 <a:solidFill>
                   <a:srgbClr val="8B0000"/>
                 </a:solidFill>
               </a:rPr>
-              <a:t>常见错误</a:t>
+              <a:t>练习题目</a:t>
             </a:r>
           </a:p>
         </p:txBody>
@@ -3589,8 +3597,8 @@
         </p:nvSpPr>
         <p:spPr>
           <a:xfrm>
-            <a:off x="914400" y="1371600"/>
-            <a:ext cx="10058400" cy="5029200"/>
+            <a:off x="457200" y="1097280"/>
+            <a:ext cx="10972800" cy="5029200"/>
           </a:xfrm>
           <a:prstGeom prst="rect">
             <a:avLst/>
@@ -3605,42 +3613,32 @@
           <a:p/>
           <a:p>
             <a:r>
-              <a:rPr sz="1600">
+              <a:rPr sz="1400">
                 <a:solidFill>
                   <a:srgbClr val="000000"/>
                 </a:solidFill>
               </a:rPr>
-              <a:t>栈空时pop/peek会出错</a:t>
-            </a:r>
-          </a:p>
-          <a:p>
-            <a:r>
-              <a:rPr sz="1600">
+              <a:t>JD099 双栈为队 - 两个栈模拟队列 (Medium)</a:t>
+            </a:r>
+          </a:p>
+          <a:p>
+            <a:r>
+              <a:rPr sz="1400">
                 <a:solidFill>
                   <a:srgbClr val="000000"/>
                 </a:solidFill>
               </a:rPr>
-              <a:t>队列空时front会出错</a:t>
-            </a:r>
-          </a:p>
-          <a:p>
-            <a:r>
-              <a:rPr sz="1600">
+              <a:t>JD100 铁链翻转 - 链表反转 (Medium)</a:t>
+            </a:r>
+          </a:p>
+          <a:p>
+            <a:r>
+              <a:rPr sz="1400">
                 <a:solidFill>
                   <a:srgbClr val="000000"/>
                 </a:solidFill>
               </a:rPr>
-              <a:t>链表操作顺序很重要</a:t>
-            </a:r>
-          </a:p>
-          <a:p>
-            <a:r>
-              <a:rPr sz="1600">
-                <a:solidFill>
-                  <a:srgbClr val="000000"/>
-                </a:solidFill>
-              </a:rPr>
-              <a:t>STL容器的size()是O(1)</a:t>
+              <a:t>JD101 双链归并 - 合并有序链表 (Medium)</a:t>
             </a:r>
           </a:p>
         </p:txBody>
@@ -3671,8 +3669,8 @@
         </p:nvSpPr>
         <p:spPr>
           <a:xfrm>
-            <a:off x="914400" y="457200"/>
-            <a:ext cx="10058400" cy="914400"/>
+            <a:off x="457200" y="274320"/>
+            <a:ext cx="10972800" cy="731520"/>
           </a:xfrm>
           <a:prstGeom prst="rect">
             <a:avLst/>
@@ -3686,12 +3684,12 @@
           <a:lstStyle/>
           <a:p>
             <a:r>
-              <a:rPr sz="2800" b="1">
+              <a:rPr sz="2400" b="1">
                 <a:solidFill>
                   <a:srgbClr val="8B0000"/>
                 </a:solidFill>
               </a:rPr>
-              <a:t>练习题目</a:t>
+              <a:t>本章小结</a:t>
             </a:r>
           </a:p>
         </p:txBody>
@@ -3704,8 +3702,8 @@
         </p:nvSpPr>
         <p:spPr>
           <a:xfrm>
-            <a:off x="914400" y="1371600"/>
-            <a:ext cx="10058400" cy="5029200"/>
+            <a:off x="457200" y="1097280"/>
+            <a:ext cx="10972800" cy="5029200"/>
           </a:xfrm>
           <a:prstGeom prst="rect">
             <a:avLst/>
@@ -3720,147 +3718,42 @@
           <a:p/>
           <a:p>
             <a:r>
-              <a:rPr sz="1600">
+              <a:rPr sz="1400">
                 <a:solidFill>
                   <a:srgbClr val="000000"/>
                 </a:solidFill>
               </a:rPr>
-              <a:t>JD099 双栈为队</a:t>
-            </a:r>
-          </a:p>
-          <a:p>
-            <a:r>
-              <a:rPr sz="1600">
+              <a:t>本章学习了第8章的核心概念</a:t>
+            </a:r>
+          </a:p>
+          <a:p>
+            <a:r>
+              <a:rPr sz="1400">
                 <a:solidFill>
                   <a:srgbClr val="000000"/>
                 </a:solidFill>
               </a:rPr>
-              <a:t>JD100 铁链翻转</a:t>
-            </a:r>
-          </a:p>
-          <a:p>
-            <a:r>
-              <a:rPr sz="1600">
+              <a:t>多做练习是掌握算法的关键</a:t>
+            </a:r>
+          </a:p>
+          <a:p>
+            <a:r>
+              <a:rPr sz="1400">
                 <a:solidFill>
                   <a:srgbClr val="000000"/>
                 </a:solidFill>
               </a:rPr>
-              <a:t>JD101 双链归并</a:t>
-            </a:r>
-          </a:p>
-        </p:txBody>
-      </p:sp>
-    </p:spTree>
-  </p:cSld>
-  <p:clrMapOvr>
-    <a:masterClrMapping/>
-  </p:clrMapOvr>
-</p:sld>
-</file>
-
-<file path=ppt/slides/slide8.xml><?xml version="1.0" encoding="utf-8"?>
-<p:sld xmlns:a="http://schemas.openxmlformats.org/drawingml/2006/main" xmlns:p="http://schemas.openxmlformats.org/presentationml/2006/main" xmlns:r="http://schemas.openxmlformats.org/officeDocument/2006/relationships">
-  <p:cSld>
-    <p:spTree>
-      <p:nvGrpSpPr>
-        <p:cNvPr id="1" name=""/>
-        <p:cNvGrpSpPr/>
-        <p:nvPr/>
-      </p:nvGrpSpPr>
-      <p:grpSpPr/>
-      <p:sp>
-        <p:nvSpPr>
-          <p:cNvPr id="2" name="TextBox 1"/>
-          <p:cNvSpPr txBox="1"/>
-          <p:nvPr/>
-        </p:nvSpPr>
-        <p:spPr>
-          <a:xfrm>
-            <a:off x="914400" y="457200"/>
-            <a:ext cx="10058400" cy="914400"/>
-          </a:xfrm>
-          <a:prstGeom prst="rect">
-            <a:avLst/>
-          </a:prstGeom>
-          <a:noFill/>
-        </p:spPr>
-        <p:txBody>
-          <a:bodyPr wrap="none">
-            <a:spAutoFit/>
-          </a:bodyPr>
-          <a:lstStyle/>
-          <a:p>
-            <a:r>
-              <a:rPr sz="2800" b="1">
-                <a:solidFill>
-                  <a:srgbClr val="8B0000"/>
+              <a:t>理解算法思想比死记代码更重要</a:t>
+            </a:r>
+          </a:p>
+          <a:p>
+            <a:r>
+              <a:rPr sz="1400">
+                <a:solidFill>
+                  <a:srgbClr val="000000"/>
                 </a:solidFill>
               </a:rPr>
-              <a:t>本章小结</a:t>
-            </a:r>
-          </a:p>
-        </p:txBody>
-      </p:sp>
-      <p:sp>
-        <p:nvSpPr>
-          <p:cNvPr id="3" name="TextBox 2"/>
-          <p:cNvSpPr txBox="1"/>
-          <p:nvPr/>
-        </p:nvSpPr>
-        <p:spPr>
-          <a:xfrm>
-            <a:off x="914400" y="1371600"/>
-            <a:ext cx="10058400" cy="5029200"/>
-          </a:xfrm>
-          <a:prstGeom prst="rect">
-            <a:avLst/>
-          </a:prstGeom>
-          <a:noFill/>
-        </p:spPr>
-        <p:txBody>
-          <a:bodyPr wrap="none">
-            <a:spAutoFit/>
-          </a:bodyPr>
-          <a:lstStyle/>
-          <a:p/>
-          <a:p>
-            <a:r>
-              <a:rPr sz="1600">
-                <a:solidFill>
-                  <a:srgbClr val="000000"/>
-                </a:solidFill>
-              </a:rPr>
-              <a:t>掌握核心概念</a:t>
-            </a:r>
-          </a:p>
-          <a:p>
-            <a:r>
-              <a:rPr sz="1600">
-                <a:solidFill>
-                  <a:srgbClr val="000000"/>
-                </a:solidFill>
-              </a:rPr>
-              <a:t>多做练习</a:t>
-            </a:r>
-          </a:p>
-          <a:p>
-            <a:r>
-              <a:rPr sz="1600">
-                <a:solidFill>
-                  <a:srgbClr val="000000"/>
-                </a:solidFill>
-              </a:rPr>
-              <a:t>注意边界条件</a:t>
-            </a:r>
-          </a:p>
-          <a:p>
-            <a:r>
-              <a:rPr sz="1600">
-                <a:solidFill>
-                  <a:srgbClr val="000000"/>
-                </a:solidFill>
-              </a:rPr>
-              <a:t>理解算法思想而非死记代码</a:t>
+              <a:t>遇到问题先画图、再想算法、最后写代码</a:t>
             </a:r>
           </a:p>
         </p:txBody>

--- a/textbook/ppt/chapter08_ppt.pptx
+++ b/textbook/ppt/chapter08_ppt.pptx
@@ -12,6 +12,7 @@
     <p:sldId id="260" r:id="rId11"/>
     <p:sldId id="261" r:id="rId12"/>
     <p:sldId id="262" r:id="rId13"/>
+    <p:sldId id="263" r:id="rId14"/>
   </p:sldIdLst>
   <p:sldSz cx="12188952" cy="6858000" type="screen4x3"/>
   <p:notesSz cx="6858000" cy="9144000"/>
@@ -3754,6 +3755,91 @@
                 </a:solidFill>
               </a:rPr>
               <a:t>遇到问题先画图、再想算法、最后写代码</a:t>
+            </a:r>
+          </a:p>
+        </p:txBody>
+      </p:sp>
+    </p:spTree>
+  </p:cSld>
+  <p:clrMapOvr>
+    <a:masterClrMapping/>
+  </p:clrMapOvr>
+</p:sld>
+</file>
+
+<file path=ppt/slides/slide8.xml><?xml version="1.0" encoding="utf-8"?>
+<p:sld xmlns:a="http://schemas.openxmlformats.org/drawingml/2006/main" xmlns:p="http://schemas.openxmlformats.org/presentationml/2006/main" xmlns:r="http://schemas.openxmlformats.org/officeDocument/2006/relationships">
+  <p:cSld>
+    <p:spTree>
+      <p:nvGrpSpPr>
+        <p:cNvPr id="1" name=""/>
+        <p:cNvGrpSpPr/>
+        <p:nvPr/>
+      </p:nvGrpSpPr>
+      <p:grpSpPr/>
+      <p:sp>
+        <p:nvSpPr>
+          <p:cNvPr id="2" name="TextBox 1"/>
+          <p:cNvSpPr txBox="1"/>
+          <p:nvPr/>
+        </p:nvSpPr>
+        <p:spPr>
+          <a:xfrm>
+            <a:off x="457200" y="274320"/>
+            <a:ext cx="10972800" cy="731520"/>
+          </a:xfrm>
+          <a:prstGeom prst="rect">
+            <a:avLst/>
+          </a:prstGeom>
+          <a:noFill/>
+        </p:spPr>
+        <p:txBody>
+          <a:bodyPr wrap="none">
+            <a:spAutoFit/>
+          </a:bodyPr>
+          <a:lstStyle/>
+          <a:p>
+            <a:r>
+              <a:rPr sz="2400" b="1">
+                <a:solidFill>
+                  <a:srgbClr val="8B0000"/>
+                </a:solidFill>
+              </a:rPr>
+              <a:t>本章概览</a:t>
+            </a:r>
+          </a:p>
+        </p:txBody>
+      </p:sp>
+      <p:sp>
+        <p:nvSpPr>
+          <p:cNvPr id="3" name="TextBox 2"/>
+          <p:cNvSpPr txBox="1"/>
+          <p:nvPr/>
+        </p:nvSpPr>
+        <p:spPr>
+          <a:xfrm>
+            <a:off x="457200" y="1097280"/>
+            <a:ext cx="10972800" cy="5029200"/>
+          </a:xfrm>
+          <a:prstGeom prst="rect">
+            <a:avLst/>
+          </a:prstGeom>
+          <a:noFill/>
+        </p:spPr>
+        <p:txBody>
+          <a:bodyPr wrap="none">
+            <a:spAutoFit/>
+          </a:bodyPr>
+          <a:lstStyle/>
+          <a:p/>
+          <a:p>
+            <a:r>
+              <a:rPr sz="1600">
+                <a:solidFill>
+                  <a:srgbClr val="000000"/>
+                </a:solidFill>
+              </a:rPr>
+              <a:t>本章学习STL容器——栈、队列、链表等数据结构的实际应用。</a:t>
             </a:r>
           </a:p>
         </p:txBody>

--- a/textbook/ppt/chapter08_ppt.pptx
+++ b/textbook/ppt/chapter08_ppt.pptx
@@ -13,6 +13,7 @@
     <p:sldId id="261" r:id="rId12"/>
     <p:sldId id="262" r:id="rId13"/>
     <p:sldId id="263" r:id="rId14"/>
+    <p:sldId id="264" r:id="rId15"/>
   </p:sldIdLst>
   <p:sldSz cx="12188952" cy="6858000" type="screen4x3"/>
   <p:notesSz cx="6858000" cy="9144000"/>
@@ -3724,7 +3725,7 @@
                   <a:srgbClr val="000000"/>
                 </a:solidFill>
               </a:rPr>
-              <a:t>本章学习了第8章的核心概念</a:t>
+              <a:t/>
             </a:r>
           </a:p>
           <a:p>
@@ -3734,7 +3735,7 @@
                   <a:srgbClr val="000000"/>
                 </a:solidFill>
               </a:rPr>
-              <a:t>多做练习是掌握算法的关键</a:t>
+              <a:t/>
             </a:r>
           </a:p>
           <a:p>
@@ -3744,7 +3745,7 @@
                   <a:srgbClr val="000000"/>
                 </a:solidFill>
               </a:rPr>
-              <a:t>理解算法思想比死记代码更重要</a:t>
+              <a:t/>
             </a:r>
           </a:p>
           <a:p>
@@ -3754,7 +3755,7 @@
                   <a:srgbClr val="000000"/>
                 </a:solidFill>
               </a:rPr>
-              <a:t>遇到问题先画图、再想算法、最后写代码</a:t>
+              <a:t/>
             </a:r>
           </a:p>
         </p:txBody>
@@ -3840,6 +3841,121 @@
                 </a:solidFill>
               </a:rPr>
               <a:t>本章学习STL容器——栈、队列、链表等数据结构的实际应用。</a:t>
+            </a:r>
+          </a:p>
+        </p:txBody>
+      </p:sp>
+    </p:spTree>
+  </p:cSld>
+  <p:clrMapOvr>
+    <a:masterClrMapping/>
+  </p:clrMapOvr>
+</p:sld>
+</file>
+
+<file path=ppt/slides/slide9.xml><?xml version="1.0" encoding="utf-8"?>
+<p:sld xmlns:a="http://schemas.openxmlformats.org/drawingml/2006/main" xmlns:p="http://schemas.openxmlformats.org/presentationml/2006/main" xmlns:r="http://schemas.openxmlformats.org/officeDocument/2006/relationships">
+  <p:cSld>
+    <p:spTree>
+      <p:nvGrpSpPr>
+        <p:cNvPr id="1" name=""/>
+        <p:cNvGrpSpPr/>
+        <p:nvPr/>
+      </p:nvGrpSpPr>
+      <p:grpSpPr/>
+      <p:sp>
+        <p:nvSpPr>
+          <p:cNvPr id="2" name="TextBox 1"/>
+          <p:cNvSpPr txBox="1"/>
+          <p:nvPr/>
+        </p:nvSpPr>
+        <p:spPr>
+          <a:xfrm>
+            <a:off x="457200" y="274320"/>
+            <a:ext cx="10972800" cy="731520"/>
+          </a:xfrm>
+          <a:prstGeom prst="rect">
+            <a:avLst/>
+          </a:prstGeom>
+          <a:noFill/>
+        </p:spPr>
+        <p:txBody>
+          <a:bodyPr wrap="none">
+            <a:spAutoFit/>
+          </a:bodyPr>
+          <a:lstStyle/>
+          <a:p>
+            <a:r>
+              <a:rPr sz="2400" b="1">
+                <a:solidFill>
+                  <a:srgbClr val="8B0000"/>
+                </a:solidFill>
+              </a:rPr>
+              <a:t>第8章 核心要点</a:t>
+            </a:r>
+          </a:p>
+        </p:txBody>
+      </p:sp>
+      <p:sp>
+        <p:nvSpPr>
+          <p:cNvPr id="3" name="TextBox 2"/>
+          <p:cNvSpPr txBox="1"/>
+          <p:nvPr/>
+        </p:nvSpPr>
+        <p:spPr>
+          <a:xfrm>
+            <a:off x="457200" y="1097280"/>
+            <a:ext cx="10972800" cy="5029200"/>
+          </a:xfrm>
+          <a:prstGeom prst="rect">
+            <a:avLst/>
+          </a:prstGeom>
+          <a:noFill/>
+        </p:spPr>
+        <p:txBody>
+          <a:bodyPr wrap="none">
+            <a:spAutoFit/>
+          </a:bodyPr>
+          <a:lstStyle/>
+          <a:p/>
+          <a:p>
+            <a:r>
+              <a:rPr sz="1600">
+                <a:solidFill>
+                  <a:srgbClr val="000000"/>
+                </a:solidFill>
+              </a:rPr>
+              <a:t>• 栈 Stack：后进先出 LIFO</a:t>
+            </a:r>
+          </a:p>
+          <a:p>
+            <a:r>
+              <a:rPr sz="1600">
+                <a:solidFill>
+                  <a:srgbClr val="000000"/>
+                </a:solidFill>
+              </a:rPr>
+              <a:t>• 队列 Queue：先进先出 FIFO</a:t>
+            </a:r>
+          </a:p>
+          <a:p>
+            <a:r>
+              <a:rPr sz="1600">
+                <a:solidFill>
+                  <a:srgbClr val="000000"/>
+                </a:solidFill>
+              </a:rPr>
+              <a:t>• 链表的插入和删除操作</a:t>
+            </a:r>
+          </a:p>
+          <a:p>
+            <a:r>
+              <a:rPr sz="1600">
+                <a:solidFill>
+                  <a:srgbClr val="000000"/>
+                </a:solidFill>
+              </a:rPr>
+              <a:t>• STL 容器的基本使用</a:t>
             </a:r>
           </a:p>
         </p:txBody>
